--- a/public/fun/pack/pptx/newspro/카드뉴스프리미엄_40_오늘의한마디_모노블랙.pptx
+++ b/public/fun/pack/pptx/newspro/카드뉴스프리미엄_40_오늘의한마디_모노블랙.pptx
@@ -113,12 +113,12 @@
   <p:extLst>
     <p:ext uri="{521415D9-36F7-43E2-AB2F-B90AF26B5E84}">
       <p14:sectionLst xmlns:p14="http://schemas.microsoft.com/office/powerpoint/2010/main">
-        <p14:section name="시작" id="{287458B7-7530-4347-8015-4D2E9E8B6D9A}">
+        <p14:section name="시작" id="{7A0BBD39-4C6B-4C4D-BCF5-E844B4D3BEAB}">
           <p14:sldIdLst>
             <p14:sldId id="256"/>
           </p14:sldIdLst>
         </p14:section>
-        <p14:section name="본문" id="{37D7C074-69FE-4803-B95B-6A924FA6B2B7}">
+        <p14:section name="본문" id="{60D49CF0-4F18-47BA-9B40-F95A95882E45}">
           <p14:sldIdLst>
             <p14:sldId id="257"/>
             <p14:sldId id="258"/>
@@ -127,7 +127,7 @@
             <p14:sldId id="261"/>
           </p14:sldIdLst>
         </p14:section>
-        <p14:section name="마무리" id="{DC60D503-C552-49F6-82E3-F434B1252790}">
+        <p14:section name="마무리" id="{F54B7999-F0CE-46D8-BDDB-DEF68E6541C3}">
           <p14:sldIdLst>
             <p14:sldId id="262"/>
           </p14:sldIdLst>
@@ -1423,7 +1423,7 @@
             </a:lvl1pPr>
           </a:lstStyle>
           <a:p>
-            <a:fld id="{E4EB8632-7E5C-47E7-A82A-E0701A541982}" type="slidenum">
+            <a:fld id="{D585E2FB-C4B7-4608-B778-EEBAC620A07F}" type="slidenum">
               <a:rPr lang="en-US"/>
               <a:t>‹#›</a:t>
             </a:fld>
@@ -2034,7 +2034,7 @@
             </a:lvl1pPr>
           </a:lstStyle>
           <a:p>
-            <a:fld id="{7B589EB0-A602-400C-B34B-B756DEEDF8F9}" type="slidenum">
+            <a:fld id="{EF5458D5-707D-4324-9742-EB096AEB8035}" type="slidenum">
               <a:rPr lang="en-US"/>
               <a:t>‹#›</a:t>
             </a:fld>
@@ -2725,7 +2725,7 @@
             </a:lvl1pPr>
           </a:lstStyle>
           <a:p>
-            <a:fld id="{28197EFE-530F-40BD-90D0-805456E1CB3D}" type="slidenum">
+            <a:fld id="{CDA30907-F4F2-4B92-8EE0-2EBA4749724E}" type="slidenum">
               <a:rPr lang="en-US"/>
               <a:t>‹#›</a:t>
             </a:fld>
@@ -3721,7 +3721,7 @@
           <a:bodyPr/>
           <a:lstStyle/>
           <a:p>
-            <a:fld id="{1CA86EA6-DAAB-4D7C-B73B-251518FCB7EB}" type="slidenum">
+            <a:fld id="{AAE48B0C-A08E-4076-9C69-A61C3413621D}" type="slidenum">
               <a:rPr lang="en-US"/>
               <a:t>‹#›</a:t>
             </a:fld>
@@ -3887,7 +3887,7 @@
           <a:bodyPr/>
           <a:lstStyle/>
           <a:p>
-            <a:fld id="{16071358-F8D9-416A-9349-355C240005E4}" type="slidenum">
+            <a:fld id="{21CC9B03-683C-49EF-911A-5E21F3DE0DF8}" type="slidenum">
               <a:rPr lang="en-US"/>
               <a:t>‹#›</a:t>
             </a:fld>
@@ -4053,7 +4053,7 @@
           <a:bodyPr/>
           <a:lstStyle/>
           <a:p>
-            <a:fld id="{F1ADBE71-B397-4C7D-A20F-C905D7987367}" type="slidenum">
+            <a:fld id="{D84AB10C-FA42-4427-8CB8-85A4C4E73FB3}" type="slidenum">
               <a:rPr lang="en-US"/>
               <a:t>‹#›</a:t>
             </a:fld>
@@ -4219,7 +4219,7 @@
           <a:bodyPr/>
           <a:lstStyle/>
           <a:p>
-            <a:fld id="{55DA5B43-7BB2-4BCD-B78E-246F9261730C}" type="slidenum">
+            <a:fld id="{05CFF650-0FB5-4CB8-8EFE-7643852B898C}" type="slidenum">
               <a:rPr lang="en-US"/>
               <a:t>‹#›</a:t>
             </a:fld>
@@ -4385,7 +4385,7 @@
           <a:bodyPr/>
           <a:lstStyle/>
           <a:p>
-            <a:fld id="{30735C4F-99E1-4B3A-A0B3-3C98F67890AD}" type="slidenum">
+            <a:fld id="{D12C38FF-358E-411B-B1FE-163999E86BA4}" type="slidenum">
               <a:rPr lang="en-US"/>
               <a:t>‹#›</a:t>
             </a:fld>
